--- a/ReliCast_PPT.pptx
+++ b/ReliCast_PPT.pptx
@@ -12598,7 +12598,7 @@
                 </a:solidFill>
                 <a:latin typeface="Calibri"/>
               </a:rPr>
-              <a:t>T = U[0,1) x W x 2^k, W = clamp(20 + 4(owd + 4 jitter), 20, 200) ms</a:t>
+              <a:t>T = U[0,1) x W x 2^k, W = clamp(10 + 3(owd + 4 jitter), 10, 100) ms</a:t>
             </a:r>
           </a:p>
           <a:p>
@@ -12700,7 +12700,7 @@
                 </a:solidFill>
                 <a:latin typeface="Calibri"/>
               </a:rPr>
-              <a:t>10 ms hold-off, repair the union of ranges once, 30 ms repair guard</a:t>
+              <a:t>6 ms hold-off, repair the union of ranges once, 30 ms repair guard</a:t>
             </a:r>
           </a:p>
           <a:p>
